--- a/docs/pptx/auc3/ritu-auc3-adjcif-anyhosp.pptx
+++ b/docs/pptx/auc3/ritu-auc3-adjcif-anyhosp.pptx
@@ -2271,7 +2271,7 @@
           </p:nvSpPr>
           <p:spPr>
             <a:xfrm>
-              <a:off x="910695" y="5031234"/>
+              <a:off x="910695" y="5033711"/>
               <a:ext cx="7706515" cy="0"/>
             </a:xfrm>
             <a:custGeom>
@@ -2314,7 +2314,7 @@
           </p:nvSpPr>
           <p:spPr>
             <a:xfrm>
-              <a:off x="910695" y="3932858"/>
+              <a:off x="910695" y="3940291"/>
               <a:ext cx="7706515" cy="0"/>
             </a:xfrm>
             <a:custGeom>
@@ -2357,7 +2357,7 @@
           </p:nvSpPr>
           <p:spPr>
             <a:xfrm>
-              <a:off x="910695" y="2834483"/>
+              <a:off x="910695" y="2846870"/>
               <a:ext cx="7706515" cy="0"/>
             </a:xfrm>
             <a:custGeom>
@@ -2615,7 +2615,7 @@
           </p:nvSpPr>
           <p:spPr>
             <a:xfrm>
-              <a:off x="910695" y="4482046"/>
+              <a:off x="910695" y="4487001"/>
               <a:ext cx="7706515" cy="0"/>
             </a:xfrm>
             <a:custGeom>
@@ -2658,7 +2658,7 @@
           </p:nvSpPr>
           <p:spPr>
             <a:xfrm>
-              <a:off x="910695" y="3383670"/>
+              <a:off x="910695" y="3393581"/>
               <a:ext cx="7706515" cy="0"/>
             </a:xfrm>
             <a:custGeom>
@@ -2830,150 +2830,150 @@
           </p:nvSpPr>
           <p:spPr>
             <a:xfrm>
-              <a:off x="1260991" y="3978926"/>
-              <a:ext cx="7005923" cy="1540600"/>
+              <a:off x="1260991" y="3969744"/>
+              <a:ext cx="7005923" cy="1549598"/>
             </a:xfrm>
             <a:custGeom>
               <a:avLst/>
               <a:pathLst>
-                <a:path w="7005923" h="1540600">
+                <a:path w="7005923" h="1549598">
                   <a:moveTo>
-                    <a:pt x="0" y="1540600"/>
+                    <a:pt x="0" y="1549598"/>
                   </a:moveTo>
                   <a:lnTo>
-                    <a:pt x="175148" y="1540600"/>
-                  </a:lnTo>
-                  <a:lnTo>
-                    <a:pt x="175148" y="1480287"/>
-                  </a:lnTo>
-                  <a:lnTo>
-                    <a:pt x="262722" y="1480287"/>
-                  </a:lnTo>
-                  <a:lnTo>
-                    <a:pt x="262722" y="1420381"/>
-                  </a:lnTo>
-                  <a:lnTo>
-                    <a:pt x="350296" y="1420381"/>
-                  </a:lnTo>
-                  <a:lnTo>
-                    <a:pt x="350296" y="1361148"/>
-                  </a:lnTo>
-                  <a:lnTo>
-                    <a:pt x="700592" y="1361148"/>
-                  </a:lnTo>
-                  <a:lnTo>
-                    <a:pt x="700592" y="1302459"/>
-                  </a:lnTo>
-                  <a:lnTo>
-                    <a:pt x="788166" y="1302459"/>
-                  </a:lnTo>
-                  <a:lnTo>
-                    <a:pt x="788166" y="1243922"/>
-                  </a:lnTo>
-                  <a:lnTo>
-                    <a:pt x="1488758" y="1243922"/>
-                  </a:lnTo>
-                  <a:lnTo>
-                    <a:pt x="1488758" y="1185898"/>
-                  </a:lnTo>
-                  <a:lnTo>
-                    <a:pt x="1663906" y="1185898"/>
-                  </a:lnTo>
-                  <a:lnTo>
-                    <a:pt x="1663906" y="1126511"/>
-                  </a:lnTo>
-                  <a:lnTo>
-                    <a:pt x="1926628" y="1126511"/>
-                  </a:lnTo>
-                  <a:lnTo>
-                    <a:pt x="1926628" y="1010067"/>
-                  </a:lnTo>
-                  <a:lnTo>
-                    <a:pt x="3065091" y="1010067"/>
-                  </a:lnTo>
-                  <a:lnTo>
-                    <a:pt x="3065091" y="946776"/>
-                  </a:lnTo>
-                  <a:lnTo>
-                    <a:pt x="3240239" y="946776"/>
-                  </a:lnTo>
-                  <a:lnTo>
-                    <a:pt x="3240239" y="878803"/>
-                  </a:lnTo>
-                  <a:lnTo>
-                    <a:pt x="3502961" y="878803"/>
-                  </a:lnTo>
-                  <a:lnTo>
-                    <a:pt x="3502961" y="811541"/>
-                  </a:lnTo>
-                  <a:lnTo>
-                    <a:pt x="4028405" y="811541"/>
-                  </a:lnTo>
-                  <a:lnTo>
-                    <a:pt x="4028405" y="743857"/>
-                  </a:lnTo>
-                  <a:lnTo>
-                    <a:pt x="4641424" y="743857"/>
-                  </a:lnTo>
-                  <a:lnTo>
-                    <a:pt x="4641424" y="676761"/>
-                  </a:lnTo>
-                  <a:lnTo>
-                    <a:pt x="5342016" y="676761"/>
-                  </a:lnTo>
-                  <a:lnTo>
-                    <a:pt x="5342016" y="609840"/>
-                  </a:lnTo>
-                  <a:lnTo>
-                    <a:pt x="5429590" y="609840"/>
-                  </a:lnTo>
-                  <a:lnTo>
-                    <a:pt x="5429590" y="541375"/>
-                  </a:lnTo>
-                  <a:lnTo>
-                    <a:pt x="5692312" y="541375"/>
-                  </a:lnTo>
-                  <a:lnTo>
-                    <a:pt x="5692312" y="473883"/>
-                  </a:lnTo>
-                  <a:lnTo>
-                    <a:pt x="5779886" y="473883"/>
-                  </a:lnTo>
-                  <a:lnTo>
-                    <a:pt x="5779886" y="406989"/>
-                  </a:lnTo>
-                  <a:lnTo>
-                    <a:pt x="5867460" y="406989"/>
-                  </a:lnTo>
-                  <a:lnTo>
-                    <a:pt x="5867460" y="339894"/>
-                  </a:lnTo>
-                  <a:lnTo>
-                    <a:pt x="6130182" y="339894"/>
-                  </a:lnTo>
-                  <a:lnTo>
-                    <a:pt x="6130182" y="272655"/>
-                  </a:lnTo>
-                  <a:lnTo>
-                    <a:pt x="6305331" y="272655"/>
-                  </a:lnTo>
-                  <a:lnTo>
-                    <a:pt x="6305331" y="204992"/>
-                  </a:lnTo>
-                  <a:lnTo>
-                    <a:pt x="6480479" y="204992"/>
-                  </a:lnTo>
-                  <a:lnTo>
-                    <a:pt x="6480479" y="136013"/>
-                  </a:lnTo>
-                  <a:lnTo>
-                    <a:pt x="6568053" y="136013"/>
-                  </a:lnTo>
-                  <a:lnTo>
-                    <a:pt x="6568053" y="67618"/>
-                  </a:lnTo>
-                  <a:lnTo>
-                    <a:pt x="7005923" y="67618"/>
+                    <a:pt x="175148" y="1549598"/>
+                  </a:lnTo>
+                  <a:lnTo>
+                    <a:pt x="175148" y="1489108"/>
+                  </a:lnTo>
+                  <a:lnTo>
+                    <a:pt x="262722" y="1489108"/>
+                  </a:lnTo>
+                  <a:lnTo>
+                    <a:pt x="262722" y="1429024"/>
+                  </a:lnTo>
+                  <a:lnTo>
+                    <a:pt x="350296" y="1429024"/>
+                  </a:lnTo>
+                  <a:lnTo>
+                    <a:pt x="350296" y="1369607"/>
+                  </a:lnTo>
+                  <a:lnTo>
+                    <a:pt x="700592" y="1369607"/>
+                  </a:lnTo>
+                  <a:lnTo>
+                    <a:pt x="700592" y="1310729"/>
+                  </a:lnTo>
+                  <a:lnTo>
+                    <a:pt x="788166" y="1310729"/>
+                  </a:lnTo>
+                  <a:lnTo>
+                    <a:pt x="788166" y="1252011"/>
+                  </a:lnTo>
+                  <a:lnTo>
+                    <a:pt x="1488758" y="1252011"/>
+                  </a:lnTo>
+                  <a:lnTo>
+                    <a:pt x="1488758" y="1193812"/>
+                  </a:lnTo>
+                  <a:lnTo>
+                    <a:pt x="1663906" y="1193812"/>
+                  </a:lnTo>
+                  <a:lnTo>
+                    <a:pt x="1663906" y="1134172"/>
+                  </a:lnTo>
+                  <a:lnTo>
+                    <a:pt x="1926628" y="1134172"/>
+                  </a:lnTo>
+                  <a:lnTo>
+                    <a:pt x="1926628" y="1017224"/>
+                  </a:lnTo>
+                  <a:lnTo>
+                    <a:pt x="3065091" y="1017224"/>
+                  </a:lnTo>
+                  <a:lnTo>
+                    <a:pt x="3065091" y="953350"/>
+                  </a:lnTo>
+                  <a:lnTo>
+                    <a:pt x="3240239" y="953350"/>
+                  </a:lnTo>
+                  <a:lnTo>
+                    <a:pt x="3240239" y="884769"/>
+                  </a:lnTo>
+                  <a:lnTo>
+                    <a:pt x="3502961" y="884769"/>
+                  </a:lnTo>
+                  <a:lnTo>
+                    <a:pt x="3502961" y="816909"/>
+                  </a:lnTo>
+                  <a:lnTo>
+                    <a:pt x="4028405" y="816909"/>
+                  </a:lnTo>
+                  <a:lnTo>
+                    <a:pt x="4028405" y="748664"/>
+                  </a:lnTo>
+                  <a:lnTo>
+                    <a:pt x="4641424" y="748664"/>
+                  </a:lnTo>
+                  <a:lnTo>
+                    <a:pt x="4641424" y="681007"/>
+                  </a:lnTo>
+                  <a:lnTo>
+                    <a:pt x="5342016" y="681007"/>
+                  </a:lnTo>
+                  <a:lnTo>
+                    <a:pt x="5342016" y="613557"/>
+                  </a:lnTo>
+                  <a:lnTo>
+                    <a:pt x="5429590" y="613557"/>
+                  </a:lnTo>
+                  <a:lnTo>
+                    <a:pt x="5429590" y="544660"/>
+                  </a:lnTo>
+                  <a:lnTo>
+                    <a:pt x="5692312" y="544660"/>
+                  </a:lnTo>
+                  <a:lnTo>
+                    <a:pt x="5692312" y="476744"/>
+                  </a:lnTo>
+                  <a:lnTo>
+                    <a:pt x="5779886" y="476744"/>
+                  </a:lnTo>
+                  <a:lnTo>
+                    <a:pt x="5779886" y="409434"/>
+                  </a:lnTo>
+                  <a:lnTo>
+                    <a:pt x="5867460" y="409434"/>
+                  </a:lnTo>
+                  <a:lnTo>
+                    <a:pt x="5867460" y="341948"/>
+                  </a:lnTo>
+                  <a:lnTo>
+                    <a:pt x="6130182" y="341948"/>
+                  </a:lnTo>
+                  <a:lnTo>
+                    <a:pt x="6130182" y="274328"/>
+                  </a:lnTo>
+                  <a:lnTo>
+                    <a:pt x="6305331" y="274328"/>
+                  </a:lnTo>
+                  <a:lnTo>
+                    <a:pt x="6305331" y="206267"/>
+                  </a:lnTo>
+                  <a:lnTo>
+                    <a:pt x="6480479" y="206267"/>
+                  </a:lnTo>
+                  <a:lnTo>
+                    <a:pt x="6480479" y="136857"/>
+                  </a:lnTo>
+                  <a:lnTo>
+                    <a:pt x="6568053" y="136857"/>
+                  </a:lnTo>
+                  <a:lnTo>
+                    <a:pt x="6568053" y="68039"/>
+                  </a:lnTo>
+                  <a:lnTo>
+                    <a:pt x="7005923" y="68039"/>
                   </a:lnTo>
                   <a:lnTo>
                     <a:pt x="7005923" y="0"/>
@@ -3006,149 +3006,149 @@
           <p:spPr>
             <a:xfrm>
               <a:off x="1260991" y="2861938"/>
-              <a:ext cx="7005923" cy="2599171"/>
+              <a:ext cx="7005923" cy="2599726"/>
             </a:xfrm>
             <a:custGeom>
               <a:avLst/>
               <a:pathLst>
-                <a:path w="7005923" h="2599171">
+                <a:path w="7005923" h="2599726">
                   <a:moveTo>
-                    <a:pt x="0" y="2599171"/>
+                    <a:pt x="0" y="2599726"/>
                   </a:moveTo>
                   <a:lnTo>
-                    <a:pt x="175148" y="2599171"/>
-                  </a:lnTo>
-                  <a:lnTo>
-                    <a:pt x="175148" y="2482877"/>
-                  </a:lnTo>
-                  <a:lnTo>
-                    <a:pt x="262722" y="2482877"/>
-                  </a:lnTo>
-                  <a:lnTo>
-                    <a:pt x="262722" y="2369098"/>
-                  </a:lnTo>
-                  <a:lnTo>
-                    <a:pt x="350296" y="2369098"/>
-                  </a:lnTo>
-                  <a:lnTo>
-                    <a:pt x="350296" y="2258191"/>
-                  </a:lnTo>
-                  <a:lnTo>
-                    <a:pt x="700592" y="2258191"/>
-                  </a:lnTo>
-                  <a:lnTo>
-                    <a:pt x="700592" y="2149773"/>
-                  </a:lnTo>
-                  <a:lnTo>
-                    <a:pt x="788166" y="2149773"/>
-                  </a:lnTo>
-                  <a:lnTo>
-                    <a:pt x="788166" y="2043005"/>
-                  </a:lnTo>
-                  <a:lnTo>
-                    <a:pt x="1488758" y="2043005"/>
-                  </a:lnTo>
-                  <a:lnTo>
-                    <a:pt x="1488758" y="1938446"/>
-                  </a:lnTo>
-                  <a:lnTo>
-                    <a:pt x="1663906" y="1938446"/>
-                  </a:lnTo>
-                  <a:lnTo>
-                    <a:pt x="1663906" y="1832671"/>
-                  </a:lnTo>
-                  <a:lnTo>
-                    <a:pt x="1926628" y="1832671"/>
-                  </a:lnTo>
-                  <a:lnTo>
-                    <a:pt x="1926628" y="1628650"/>
-                  </a:lnTo>
-                  <a:lnTo>
-                    <a:pt x="3065091" y="1628650"/>
-                  </a:lnTo>
-                  <a:lnTo>
-                    <a:pt x="3065091" y="1519504"/>
-                  </a:lnTo>
-                  <a:lnTo>
-                    <a:pt x="3240239" y="1519504"/>
-                  </a:lnTo>
-                  <a:lnTo>
-                    <a:pt x="3240239" y="1403558"/>
-                  </a:lnTo>
-                  <a:lnTo>
-                    <a:pt x="3502961" y="1403558"/>
-                  </a:lnTo>
-                  <a:lnTo>
-                    <a:pt x="3502961" y="1290054"/>
-                  </a:lnTo>
-                  <a:lnTo>
-                    <a:pt x="4028405" y="1290054"/>
-                  </a:lnTo>
-                  <a:lnTo>
-                    <a:pt x="4028405" y="1177011"/>
-                  </a:lnTo>
-                  <a:lnTo>
-                    <a:pt x="4641424" y="1177011"/>
-                  </a:lnTo>
-                  <a:lnTo>
-                    <a:pt x="4641424" y="1066056"/>
-                  </a:lnTo>
-                  <a:lnTo>
-                    <a:pt x="5342016" y="1066056"/>
-                  </a:lnTo>
-                  <a:lnTo>
-                    <a:pt x="5342016" y="956440"/>
-                  </a:lnTo>
-                  <a:lnTo>
-                    <a:pt x="5429590" y="956440"/>
-                  </a:lnTo>
-                  <a:lnTo>
-                    <a:pt x="5429590" y="845334"/>
-                  </a:lnTo>
-                  <a:lnTo>
-                    <a:pt x="5692312" y="845334"/>
-                  </a:lnTo>
-                  <a:lnTo>
-                    <a:pt x="5692312" y="736795"/>
-                  </a:lnTo>
-                  <a:lnTo>
-                    <a:pt x="5779886" y="736795"/>
-                  </a:lnTo>
-                  <a:lnTo>
-                    <a:pt x="5779886" y="630155"/>
-                  </a:lnTo>
-                  <a:lnTo>
-                    <a:pt x="5867460" y="630155"/>
-                  </a:lnTo>
-                  <a:lnTo>
-                    <a:pt x="5867460" y="524102"/>
-                  </a:lnTo>
-                  <a:lnTo>
-                    <a:pt x="6130182" y="524102"/>
-                  </a:lnTo>
-                  <a:lnTo>
-                    <a:pt x="6130182" y="418708"/>
-                  </a:lnTo>
-                  <a:lnTo>
-                    <a:pt x="6305331" y="418708"/>
-                  </a:lnTo>
-                  <a:lnTo>
-                    <a:pt x="6305331" y="313521"/>
-                  </a:lnTo>
-                  <a:lnTo>
-                    <a:pt x="6480479" y="313521"/>
-                  </a:lnTo>
-                  <a:lnTo>
-                    <a:pt x="6480479" y="207169"/>
-                  </a:lnTo>
-                  <a:lnTo>
-                    <a:pt x="6568053" y="207169"/>
-                  </a:lnTo>
-                  <a:lnTo>
-                    <a:pt x="6568053" y="102576"/>
-                  </a:lnTo>
-                  <a:lnTo>
-                    <a:pt x="7005923" y="102576"/>
+                    <a:pt x="175148" y="2599726"/>
+                  </a:lnTo>
+                  <a:lnTo>
+                    <a:pt x="175148" y="2483956"/>
+                  </a:lnTo>
+                  <a:lnTo>
+                    <a:pt x="262722" y="2483956"/>
+                  </a:lnTo>
+                  <a:lnTo>
+                    <a:pt x="262722" y="2370660"/>
+                  </a:lnTo>
+                  <a:lnTo>
+                    <a:pt x="350296" y="2370660"/>
+                  </a:lnTo>
+                  <a:lnTo>
+                    <a:pt x="350296" y="2260187"/>
+                  </a:lnTo>
+                  <a:lnTo>
+                    <a:pt x="700592" y="2260187"/>
+                  </a:lnTo>
+                  <a:lnTo>
+                    <a:pt x="700592" y="2152160"/>
+                  </a:lnTo>
+                  <a:lnTo>
+                    <a:pt x="788166" y="2152160"/>
+                  </a:lnTo>
+                  <a:lnTo>
+                    <a:pt x="788166" y="2045773"/>
+                  </a:lnTo>
+                  <a:lnTo>
+                    <a:pt x="1488758" y="2045773"/>
+                  </a:lnTo>
+                  <a:lnTo>
+                    <a:pt x="1488758" y="1941577"/>
+                  </a:lnTo>
+                  <a:lnTo>
+                    <a:pt x="1663906" y="1941577"/>
+                  </a:lnTo>
+                  <a:lnTo>
+                    <a:pt x="1663906" y="1836019"/>
+                  </a:lnTo>
+                  <a:lnTo>
+                    <a:pt x="1926628" y="1836019"/>
+                  </a:lnTo>
+                  <a:lnTo>
+                    <a:pt x="1926628" y="1632356"/>
+                  </a:lnTo>
+                  <a:lnTo>
+                    <a:pt x="3065091" y="1632356"/>
+                  </a:lnTo>
+                  <a:lnTo>
+                    <a:pt x="3065091" y="1522849"/>
+                  </a:lnTo>
+                  <a:lnTo>
+                    <a:pt x="3240239" y="1522849"/>
+                  </a:lnTo>
+                  <a:lnTo>
+                    <a:pt x="3240239" y="1406535"/>
+                  </a:lnTo>
+                  <a:lnTo>
+                    <a:pt x="3502961" y="1406535"/>
+                  </a:lnTo>
+                  <a:lnTo>
+                    <a:pt x="3502961" y="1292663"/>
+                  </a:lnTo>
+                  <a:lnTo>
+                    <a:pt x="4028405" y="1292663"/>
+                  </a:lnTo>
+                  <a:lnTo>
+                    <a:pt x="4028405" y="1179304"/>
+                  </a:lnTo>
+                  <a:lnTo>
+                    <a:pt x="4641424" y="1179304"/>
+                  </a:lnTo>
+                  <a:lnTo>
+                    <a:pt x="4641424" y="1068016"/>
+                  </a:lnTo>
+                  <a:lnTo>
+                    <a:pt x="5342016" y="1068016"/>
+                  </a:lnTo>
+                  <a:lnTo>
+                    <a:pt x="5342016" y="958101"/>
+                  </a:lnTo>
+                  <a:lnTo>
+                    <a:pt x="5429590" y="958101"/>
+                  </a:lnTo>
+                  <a:lnTo>
+                    <a:pt x="5429590" y="846850"/>
+                  </a:lnTo>
+                  <a:lnTo>
+                    <a:pt x="5692312" y="846850"/>
+                  </a:lnTo>
+                  <a:lnTo>
+                    <a:pt x="5692312" y="738157"/>
+                  </a:lnTo>
+                  <a:lnTo>
+                    <a:pt x="5779886" y="738157"/>
+                  </a:lnTo>
+                  <a:lnTo>
+                    <a:pt x="5779886" y="631351"/>
+                  </a:lnTo>
+                  <a:lnTo>
+                    <a:pt x="5867460" y="631351"/>
+                  </a:lnTo>
+                  <a:lnTo>
+                    <a:pt x="5867460" y="525158"/>
+                  </a:lnTo>
+                  <a:lnTo>
+                    <a:pt x="6130182" y="525158"/>
+                  </a:lnTo>
+                  <a:lnTo>
+                    <a:pt x="6130182" y="419624"/>
+                  </a:lnTo>
+                  <a:lnTo>
+                    <a:pt x="6305331" y="419624"/>
+                  </a:lnTo>
+                  <a:lnTo>
+                    <a:pt x="6305331" y="314257"/>
+                  </a:lnTo>
+                  <a:lnTo>
+                    <a:pt x="6480479" y="314257"/>
+                  </a:lnTo>
+                  <a:lnTo>
+                    <a:pt x="6480479" y="207668"/>
+                  </a:lnTo>
+                  <a:lnTo>
+                    <a:pt x="6568053" y="207668"/>
+                  </a:lnTo>
+                  <a:lnTo>
+                    <a:pt x="6568053" y="102834"/>
+                  </a:lnTo>
+                  <a:lnTo>
+                    <a:pt x="7005923" y="102834"/>
                   </a:lnTo>
                   <a:lnTo>
                     <a:pt x="7005923" y="0"/>
@@ -3226,7 +3226,7 @@
           </p:nvSpPr>
           <p:spPr>
             <a:xfrm>
-              <a:off x="692708" y="4441995"/>
+              <a:off x="692708" y="4446951"/>
               <a:ext cx="155356" cy="80101"/>
             </a:xfrm>
             <a:prstGeom prst="rect">
@@ -3272,7 +3272,7 @@
           </p:nvSpPr>
           <p:spPr>
             <a:xfrm>
-              <a:off x="692708" y="3343620"/>
+              <a:off x="692708" y="3353530"/>
               <a:ext cx="155356" cy="80101"/>
             </a:xfrm>
             <a:prstGeom prst="rect">
@@ -3753,7 +3753,7 @@
                   <a:latin typeface="Helvetica"/>
                   <a:cs typeface="Helvetica"/>
                 </a:rPr>
-                <a:t>Discrep &gt;= +25 vs &lt;+25: subHR = 1.98 (95% CI 0.61-6.38), p = 0.255</a:t>
+                <a:t>Discrep &gt;= +25 vs &lt;+25: subHR = 1.96 (95% CI 0.61-6.31), p = 0.259</a:t>
               </a:r>
             </a:p>
           </p:txBody>
